--- a/3-Apprentissage automatique/2-défi du taux de conversion/data/Defi_Taux_Conversion.pptx
+++ b/3-Apprentissage automatique/2-défi du taux de conversion/data/Defi_Taux_Conversion.pptx
@@ -13,6 +13,7 @@
     <p:sldId id="261" r:id="rId7"/>
     <p:sldId id="262" r:id="rId8"/>
     <p:sldId id="263" r:id="rId9"/>
+    <p:sldId id="267" r:id="rId18"/>
     <p:sldId id="264" r:id="rId10"/>
     <p:sldId id="265" r:id="rId11"/>
     <p:sldId id="266" r:id="rId12"/>
@@ -1717,13 +1718,13 @@
                 <c:formatCode>General</c:formatCode>
                 <c:ptCount val="3"/>
                 <c:pt idx="0">
-                  <c:v>0.497</c:v>
+                  <c:v>0.512</c:v>
                 </c:pt>
                 <c:pt idx="1">
-                  <c:v>0.559</c:v>
+                  <c:v>0.555</c:v>
                 </c:pt>
                 <c:pt idx="2">
-                  <c:v>0.756</c:v>
+                  <c:v>0.757</c:v>
                 </c:pt>
               </c:numCache>
             </c:numRef>
@@ -2050,19 +2051,19 @@
                 <c:formatCode>General</c:formatCode>
                 <c:ptCount val="5"/>
                 <c:pt idx="0">
-                  <c:v>0.001</c:v>
+                  <c:v>0.0013</c:v>
                 </c:pt>
                 <c:pt idx="1">
-                  <c:v>0.025</c:v>
+                  <c:v>0.0254</c:v>
                 </c:pt>
                 <c:pt idx="2">
-                  <c:v>0.042</c:v>
+                  <c:v>0.0412</c:v>
                 </c:pt>
                 <c:pt idx="3">
-                  <c:v>0.059</c:v>
+                  <c:v>0.0567</c:v>
                 </c:pt>
                 <c:pt idx="4">
-                  <c:v>0.874</c:v>
+                  <c:v>0.8755</c:v>
                 </c:pt>
               </c:numCache>
             </c:numRef>
@@ -4148,7 +4149,7 @@
                 <a:ea typeface="Calibri" pitchFamily="34" charset="-122"/>
                 <a:cs typeface="Calibri" pitchFamily="34" charset="-120"/>
               </a:rPr>
-              <a:t>Métrique : Score F1   |   Gradient Boosting : F1 = 0,7556</a:t>
+              <a:t>Métrique : Score F1   |   Gradient Boosting : F1 = 0,7569</a:t>
             </a:r>
             <a:endParaRPr lang="en-US" sz="1000" dirty="0"/>
           </a:p>
@@ -4457,7 +4458,7 @@
                 <a:ea typeface="Calibri" pitchFamily="34" charset="-122"/>
                 <a:cs typeface="Calibri" pitchFamily="34" charset="-120"/>
               </a:rPr>
-              <a:t>C'est le levier n°1 (87,4% de l'importance). Mettre en place des liens recommandés, une sidebar d'articles récents et des aperçus de numéros précédents pour inciter les visiteurs à explorer davantage de contenu.</a:t>
+              <a:t>C'est le levier n°1 (87,5% de l'importance). Mettre en place des liens recommandés, une sidebar d'articles récents et des aperçus de numéros précédents pour inciter les visiteurs à explorer davantage de contenu.</a:t>
             </a:r>
             <a:endParaRPr lang="en-US" sz="900" dirty="0"/>
           </a:p>
@@ -5509,7 +5510,7 @@
                 <a:ea typeface="Calibri" pitchFamily="34" charset="-122"/>
                 <a:cs typeface="Calibri" pitchFamily="34" charset="-120"/>
               </a:rPr>
-              <a:t>Gradient Boosting retenu : F1 = 0,756 — meilleur score parmi les 3 modèles testés</a:t>
+              <a:t>Gradient Boosting retenu : F1 = 0,757 — meilleur score parmi les 3 modèles testés</a:t>
             </a:r>
             <a:endParaRPr lang="en-US" sz="1200" dirty="0"/>
           </a:p>
@@ -5616,7 +5617,7 @@
                 <a:ea typeface="Calibri" pitchFamily="34" charset="-122"/>
                 <a:cs typeface="Calibri" pitchFamily="34" charset="-120"/>
               </a:rPr>
-              <a:t>total_pages_visited : prédicteur dominant à 87,4% d'importance</a:t>
+              <a:t>total_pages_visited : prédicteur dominant à 87,5% d'importance</a:t>
             </a:r>
             <a:endParaRPr lang="en-US" sz="1200" dirty="0"/>
           </a:p>
@@ -5723,7 +5724,7 @@
                 <a:ea typeface="Calibri" pitchFamily="34" charset="-122"/>
                 <a:cs typeface="Calibri" pitchFamily="34" charset="-120"/>
               </a:rPr>
-              <a:t>834 prédictions de conversion générées sur le jeu de test (31 620 visiteurs)</a:t>
+              <a:t>837 prédictions de conversion générées sur le jeu de test (31 620 visiteurs)</a:t>
             </a:r>
             <a:endParaRPr lang="en-US" sz="1200" dirty="0"/>
           </a:p>
@@ -5870,6 +5871,623 @@
                 <a:cs typeface="Calibri" pitchFamily="34" charset="-120"/>
               </a:rPr>
               <a:t>Compétition de type Kaggle — Score F1 soumis au classement</a:t>
+            </a:r>
+            <a:endParaRPr lang="en-US" sz="1000" dirty="0"/>
+          </a:p>
+        </p:txBody>
+      </p:sp>
+    </p:spTree>
+  </p:cSld>
+  <p:clrMapOvr>
+    <a:masterClrMapping/>
+  </p:clrMapOvr>
+</p:sld>
+</file>
+
+<file path=ppt/slides/slide12.xml><?xml version="1.0" encoding="utf-8"?>
+<p:sld xmlns:a="http://schemas.openxmlformats.org/drawingml/2006/main" xmlns:r="http://schemas.openxmlformats.org/officeDocument/2006/relationships" xmlns:p="http://schemas.openxmlformats.org/presentationml/2006/main">
+  <p:cSld name="Slide 11">
+    <p:bg>
+      <p:bgPr>
+        <a:solidFill>
+          <a:srgbClr val="0A2342"/>
+        </a:solidFill>
+      </p:bgPr>
+    </p:bg>
+    <p:spTree>
+      <p:nvGrpSpPr>
+        <p:cNvPr id="1" name=""/>
+        <p:cNvGrpSpPr/>
+        <p:nvPr/>
+      </p:nvGrpSpPr>
+      <p:grpSpPr>
+        <a:xfrm>
+          <a:off x="0" y="0"/>
+          <a:ext cx="0" cy="0"/>
+          <a:chOff x="0" y="0"/>
+          <a:chExt cx="0" cy="0"/>
+        </a:xfrm>
+      </p:grpSpPr>
+      <p:sp>
+        <p:nvSpPr>
+          <p:cNvPr id="2" name="Shape 0"/>
+          <p:cNvSpPr/>
+          <p:nvPr/>
+        </p:nvSpPr>
+        <p:spPr>
+          <a:xfrm>
+            <a:off x="0" y="0"/>
+            <a:ext cx="164592" cy="5143500"/>
+          </a:xfrm>
+          <a:prstGeom prst="rect">
+            <a:avLst/>
+          </a:prstGeom>
+          <a:solidFill>
+            <a:srgbClr val="1A6B8A"/>
+          </a:solidFill>
+          <a:ln w="12700">
+            <a:solidFill>
+              <a:srgbClr val="1A6B8A"/>
+            </a:solidFill>
+            <a:prstDash val="solid"/>
+          </a:ln>
+        </p:spPr>
+      </p:sp>
+      <p:sp>
+        <p:nvSpPr>
+          <p:cNvPr id="3" name="Shape 1"/>
+          <p:cNvSpPr/>
+          <p:nvPr/>
+        </p:nvSpPr>
+        <p:spPr>
+          <a:xfrm>
+            <a:off x="164592" y="0"/>
+            <a:ext cx="64008" cy="5143500"/>
+          </a:xfrm>
+          <a:prstGeom prst="rect">
+            <a:avLst/>
+          </a:prstGeom>
+          <a:solidFill>
+            <a:srgbClr val="2AB5A0"/>
+          </a:solidFill>
+          <a:ln w="12700">
+            <a:solidFill>
+              <a:srgbClr val="2AB5A0"/>
+            </a:solidFill>
+            <a:prstDash val="solid"/>
+          </a:ln>
+        </p:spPr>
+      </p:sp>
+      <p:sp>
+        <p:nvSpPr>
+          <p:cNvPr id="4" name="Shape 2"/>
+          <p:cNvSpPr/>
+          <p:nvPr/>
+        </p:nvSpPr>
+        <p:spPr>
+          <a:xfrm>
+            <a:off x="6583680" y="-914400"/>
+            <a:ext cx="4114800" cy="4114800"/>
+          </a:xfrm>
+          <a:prstGeom prst="ellipse">
+            <a:avLst/>
+          </a:prstGeom>
+          <a:solidFill>
+            <a:srgbClr val="1A6B8A">
+              <a:alpha val="15000"/>
+            </a:srgbClr>
+          </a:solidFill>
+          <a:ln w="12700">
+            <a:solidFill>
+              <a:srgbClr val="1A6B8A">
+                <a:alpha val="25000"/>
+              </a:srgbClr>
+            </a:solidFill>
+            <a:prstDash val="solid"/>
+          </a:ln>
+        </p:spPr>
+      </p:sp>
+      <p:sp>
+        <p:nvSpPr>
+          <p:cNvPr id="5" name="Text 3"/>
+          <p:cNvSpPr/>
+          <p:nvPr/>
+        </p:nvSpPr>
+        <p:spPr>
+          <a:xfrm>
+            <a:off x="502920" y="457200"/>
+            <a:ext cx="6400800" cy="640080"/>
+          </a:xfrm>
+          <a:prstGeom prst="rect">
+            <a:avLst/>
+          </a:prstGeom>
+          <a:noFill/>
+          <a:ln/>
+        </p:spPr>
+        <p:txBody>
+          <a:bodyPr wrap="square" rtlCol="0" anchor="ctr"/>
+          <a:lstStyle/>
+          <a:p>
+            <a:pPr algn="l" indent="0" marL="0">
+              <a:buNone/>
+            </a:pPr>
+            <a:r>
+              <a:rPr lang="en-US" sz="3200" b="1" dirty="0">
+                <a:solidFill>
+                  <a:srgbClr val="FFFFFF"/>
+                </a:solidFill>
+                <a:latin typeface="Calibri" pitchFamily="34" charset="0"/>
+                <a:ea typeface="Calibri" pitchFamily="34" charset="-122"/>
+                <a:cs typeface="Calibri" pitchFamily="34" charset="-120"/>
+              </a:rPr>
+              <a:t>Validation et robustesse</a:t>
+            </a:r>
+            <a:endParaRPr lang="en-US" sz="3200" dirty="0"/>
+          </a:p>
+        </p:txBody>
+      </p:sp>
+      <p:sp>
+        <p:nvSpPr>
+          <p:cNvPr id="6" name="Shape 4"/>
+          <p:cNvSpPr/>
+          <p:nvPr/>
+        </p:nvSpPr>
+        <p:spPr>
+          <a:xfrm>
+            <a:off x="502920" y="1261872"/>
+            <a:ext cx="8046720" cy="594360"/>
+          </a:xfrm>
+          <a:prstGeom prst="rect">
+            <a:avLst/>
+          </a:prstGeom>
+          <a:solidFill>
+            <a:srgbClr val="FFFFFF">
+              <a:alpha val="8000"/>
+            </a:srgbClr>
+          </a:solidFill>
+          <a:ln w="6350">
+            <a:solidFill>
+              <a:srgbClr val="1A6B8A">
+                <a:alpha val="40000"/>
+              </a:srgbClr>
+            </a:solidFill>
+            <a:prstDash val="solid"/>
+          </a:ln>
+        </p:spPr>
+      </p:sp>
+      <p:sp>
+        <p:nvSpPr>
+          <p:cNvPr id="7" name="Text 5"/>
+          <p:cNvSpPr/>
+          <p:nvPr/>
+        </p:nvSpPr>
+        <p:spPr>
+          <a:xfrm>
+            <a:off x="594360" y="1261872"/>
+            <a:ext cx="365760" cy="594360"/>
+          </a:xfrm>
+          <a:prstGeom prst="rect">
+            <a:avLst/>
+          </a:prstGeom>
+          <a:noFill/>
+          <a:ln/>
+        </p:spPr>
+        <p:txBody>
+          <a:bodyPr wrap="square" lIns="0" tIns="0" rIns="0" bIns="0" rtlCol="0" anchor="ctr"/>
+          <a:lstStyle/>
+          <a:p>
+            <a:pPr algn="ctr" indent="0" marL="0">
+              <a:buNone/>
+            </a:pPr>
+            <a:r>
+              <a:rPr lang="en-US" sz="1400" dirty="0">
+                <a:solidFill>
+                  <a:srgbClr val="2AB5A0"/>
+                </a:solidFill>
+                <a:latin typeface="Calibri" pitchFamily="34" charset="0"/>
+                <a:ea typeface="Calibri" pitchFamily="34" charset="-122"/>
+                <a:cs typeface="Calibri" pitchFamily="34" charset="-120"/>
+              </a:rPr>
+              <a:t>✓</a:t>
+            </a:r>
+            <a:endParaRPr lang="en-US" sz="1400" dirty="0"/>
+          </a:p>
+        </p:txBody>
+      </p:sp>
+      <p:sp>
+        <p:nvSpPr>
+          <p:cNvPr id="8" name="Text 6"/>
+          <p:cNvSpPr/>
+          <p:nvPr/>
+        </p:nvSpPr>
+        <p:spPr>
+          <a:xfrm>
+            <a:off x="1005840" y="1261872"/>
+            <a:ext cx="7406640" cy="594360"/>
+          </a:xfrm>
+          <a:prstGeom prst="rect">
+            <a:avLst/>
+          </a:prstGeom>
+          <a:noFill/>
+          <a:ln/>
+        </p:spPr>
+        <p:txBody>
+          <a:bodyPr wrap="square" rtlCol="0" anchor="ctr"/>
+          <a:lstStyle/>
+          <a:p>
+            <a:pPr algn="l" indent="0" marL="0">
+              <a:buNone/>
+            </a:pPr>
+            <a:r>
+              <a:rPr lang="en-US" sz="1200" dirty="0">
+                <a:solidFill>
+                  <a:srgbClr val="FFFFFF"/>
+                </a:solidFill>
+                <a:latin typeface="Calibri" pitchFamily="34" charset="0"/>
+                <a:ea typeface="Calibri" pitchFamily="34" charset="-122"/>
+                <a:cs typeface="Calibri" pitchFamily="34" charset="-120"/>
+              </a:rPr>
+              <a:t>Validation croisée à 5 plis : Gradient Boosting confirmé meilleur modèle (F1 moyen 0,764)</a:t>
+            </a:r>
+            <a:endParaRPr lang="en-US" sz="1200" dirty="0"/>
+          </a:p>
+        </p:txBody>
+      </p:sp>
+      <p:sp>
+        <p:nvSpPr>
+          <p:cNvPr id="9" name="Shape 7"/>
+          <p:cNvSpPr/>
+          <p:nvPr/>
+        </p:nvSpPr>
+        <p:spPr>
+          <a:xfrm>
+            <a:off x="502920" y="2011680"/>
+            <a:ext cx="8046720" cy="594360"/>
+          </a:xfrm>
+          <a:prstGeom prst="rect">
+            <a:avLst/>
+          </a:prstGeom>
+          <a:solidFill>
+            <a:srgbClr val="FFFFFF">
+              <a:alpha val="8000"/>
+            </a:srgbClr>
+          </a:solidFill>
+          <a:ln w="6350">
+            <a:solidFill>
+              <a:srgbClr val="1A6B8A">
+                <a:alpha val="40000"/>
+              </a:srgbClr>
+            </a:solidFill>
+            <a:prstDash val="solid"/>
+          </a:ln>
+        </p:spPr>
+      </p:sp>
+      <p:sp>
+        <p:nvSpPr>
+          <p:cNvPr id="10" name="Text 8"/>
+          <p:cNvSpPr/>
+          <p:nvPr/>
+        </p:nvSpPr>
+        <p:spPr>
+          <a:xfrm>
+            <a:off x="594360" y="2011680"/>
+            <a:ext cx="365760" cy="594360"/>
+          </a:xfrm>
+          <a:prstGeom prst="rect">
+            <a:avLst/>
+          </a:prstGeom>
+          <a:noFill/>
+          <a:ln/>
+        </p:spPr>
+        <p:txBody>
+          <a:bodyPr wrap="square" lIns="0" tIns="0" rIns="0" bIns="0" rtlCol="0" anchor="ctr"/>
+          <a:lstStyle/>
+          <a:p>
+            <a:pPr algn="ctr" indent="0" marL="0">
+              <a:buNone/>
+            </a:pPr>
+            <a:r>
+              <a:rPr lang="en-US" sz="1400" dirty="0">
+                <a:solidFill>
+                  <a:srgbClr val="2AB5A0"/>
+                </a:solidFill>
+                <a:latin typeface="Calibri" pitchFamily="34" charset="0"/>
+                <a:ea typeface="Calibri" pitchFamily="34" charset="-122"/>
+                <a:cs typeface="Calibri" pitchFamily="34" charset="-120"/>
+              </a:rPr>
+              <a:t>✓</a:t>
+            </a:r>
+            <a:endParaRPr lang="en-US" sz="1400" dirty="0"/>
+          </a:p>
+        </p:txBody>
+      </p:sp>
+      <p:sp>
+        <p:nvSpPr>
+          <p:cNvPr id="11" name="Text 9"/>
+          <p:cNvSpPr/>
+          <p:nvPr/>
+        </p:nvSpPr>
+        <p:spPr>
+          <a:xfrm>
+            <a:off x="1005840" y="2011680"/>
+            <a:ext cx="7406640" cy="594360"/>
+          </a:xfrm>
+          <a:prstGeom prst="rect">
+            <a:avLst/>
+          </a:prstGeom>
+          <a:noFill/>
+          <a:ln/>
+        </p:spPr>
+        <p:txBody>
+          <a:bodyPr wrap="square" rtlCol="0" anchor="ctr"/>
+          <a:lstStyle/>
+          <a:p>
+            <a:pPr algn="l" indent="0" marL="0">
+              <a:buNone/>
+            </a:pPr>
+            <a:r>
+              <a:rPr lang="en-US" sz="1200" dirty="0">
+                <a:solidFill>
+                  <a:srgbClr val="FFFFFF"/>
+                </a:solidFill>
+                <a:latin typeface="Calibri" pitchFamily="34" charset="0"/>
+                <a:ea typeface="Calibri" pitchFamily="34" charset="-122"/>
+                <a:cs typeface="Calibri" pitchFamily="34" charset="-120"/>
+              </a:rPr>
+              <a:t>Stabilité élevée : écart-type des scores de seulement 0,006 sur les 5 plis</a:t>
+            </a:r>
+            <a:endParaRPr lang="en-US" sz="1200" dirty="0"/>
+          </a:p>
+        </p:txBody>
+      </p:sp>
+      <p:sp>
+        <p:nvSpPr>
+          <p:cNvPr id="12" name="Shape 10"/>
+          <p:cNvSpPr/>
+          <p:nvPr/>
+        </p:nvSpPr>
+        <p:spPr>
+          <a:xfrm>
+            <a:off x="502920" y="2761488"/>
+            <a:ext cx="8046720" cy="594360"/>
+          </a:xfrm>
+          <a:prstGeom prst="rect">
+            <a:avLst/>
+          </a:prstGeom>
+          <a:solidFill>
+            <a:srgbClr val="FFFFFF">
+              <a:alpha val="8000"/>
+            </a:srgbClr>
+          </a:solidFill>
+          <a:ln w="6350">
+            <a:solidFill>
+              <a:srgbClr val="1A6B8A">
+                <a:alpha val="40000"/>
+              </a:srgbClr>
+            </a:solidFill>
+            <a:prstDash val="solid"/>
+          </a:ln>
+        </p:spPr>
+      </p:sp>
+      <p:sp>
+        <p:nvSpPr>
+          <p:cNvPr id="13" name="Text 11"/>
+          <p:cNvSpPr/>
+          <p:nvPr/>
+        </p:nvSpPr>
+        <p:spPr>
+          <a:xfrm>
+            <a:off x="594360" y="2761488"/>
+            <a:ext cx="365760" cy="594360"/>
+          </a:xfrm>
+          <a:prstGeom prst="rect">
+            <a:avLst/>
+          </a:prstGeom>
+          <a:noFill/>
+          <a:ln/>
+        </p:spPr>
+        <p:txBody>
+          <a:bodyPr wrap="square" lIns="0" tIns="0" rIns="0" bIns="0" rtlCol="0" anchor="ctr"/>
+          <a:lstStyle/>
+          <a:p>
+            <a:pPr algn="ctr" indent="0" marL="0">
+              <a:buNone/>
+            </a:pPr>
+            <a:r>
+              <a:rPr lang="en-US" sz="1400" dirty="0">
+                <a:solidFill>
+                  <a:srgbClr val="2AB5A0"/>
+                </a:solidFill>
+                <a:latin typeface="Calibri" pitchFamily="34" charset="0"/>
+                <a:ea typeface="Calibri" pitchFamily="34" charset="-122"/>
+                <a:cs typeface="Calibri" pitchFamily="34" charset="-120"/>
+              </a:rPr>
+              <a:t>✓</a:t>
+            </a:r>
+            <a:endParaRPr lang="en-US" sz="1400" dirty="0"/>
+          </a:p>
+        </p:txBody>
+      </p:sp>
+      <p:sp>
+        <p:nvSpPr>
+          <p:cNvPr id="14" name="Text 12"/>
+          <p:cNvSpPr/>
+          <p:nvPr/>
+        </p:nvSpPr>
+        <p:spPr>
+          <a:xfrm>
+            <a:off x="1005840" y="2761488"/>
+            <a:ext cx="7406640" cy="594360"/>
+          </a:xfrm>
+          <a:prstGeom prst="rect">
+            <a:avLst/>
+          </a:prstGeom>
+          <a:noFill/>
+          <a:ln/>
+        </p:spPr>
+        <p:txBody>
+          <a:bodyPr wrap="square" rtlCol="0" anchor="ctr"/>
+          <a:lstStyle/>
+          <a:p>
+            <a:pPr algn="l" indent="0" marL="0">
+              <a:buNone/>
+            </a:pPr>
+            <a:r>
+              <a:rPr lang="en-US" sz="1200" dirty="0">
+                <a:solidFill>
+                  <a:srgbClr val="FFFFFF"/>
+                </a:solidFill>
+                <a:latin typeface="Calibri" pitchFamily="34" charset="0"/>
+                <a:ea typeface="Calibri" pitchFamily="34" charset="-122"/>
+                <a:cs typeface="Calibri" pitchFamily="34" charset="-120"/>
+              </a:rPr>
+              <a:t>Aucun surapprentissage : écarts entraînement / validation très faibles (0,0004 à 0,015)</a:t>
+            </a:r>
+            <a:endParaRPr lang="en-US" sz="1200" dirty="0"/>
+          </a:p>
+        </p:txBody>
+      </p:sp>
+      <p:sp>
+        <p:nvSpPr>
+          <p:cNvPr id="15" name="Shape 13"/>
+          <p:cNvSpPr/>
+          <p:nvPr/>
+        </p:nvSpPr>
+        <p:spPr>
+          <a:xfrm>
+            <a:off x="502920" y="3511296"/>
+            <a:ext cx="8046720" cy="594360"/>
+          </a:xfrm>
+          <a:prstGeom prst="rect">
+            <a:avLst/>
+          </a:prstGeom>
+          <a:solidFill>
+            <a:srgbClr val="FFFFFF">
+              <a:alpha val="8000"/>
+            </a:srgbClr>
+          </a:solidFill>
+          <a:ln w="6350">
+            <a:solidFill>
+              <a:srgbClr val="1A6B8A">
+                <a:alpha val="40000"/>
+              </a:srgbClr>
+            </a:solidFill>
+            <a:prstDash val="solid"/>
+          </a:ln>
+        </p:spPr>
+      </p:sp>
+      <p:sp>
+        <p:nvSpPr>
+          <p:cNvPr id="16" name="Text 14"/>
+          <p:cNvSpPr/>
+          <p:nvPr/>
+        </p:nvSpPr>
+        <p:spPr>
+          <a:xfrm>
+            <a:off x="594360" y="3511296"/>
+            <a:ext cx="365760" cy="594360"/>
+          </a:xfrm>
+          <a:prstGeom prst="rect">
+            <a:avLst/>
+          </a:prstGeom>
+          <a:noFill/>
+          <a:ln/>
+        </p:spPr>
+        <p:txBody>
+          <a:bodyPr wrap="square" lIns="0" tIns="0" rIns="0" bIns="0" rtlCol="0" anchor="ctr"/>
+          <a:lstStyle/>
+          <a:p>
+            <a:pPr algn="ctr" indent="0" marL="0">
+              <a:buNone/>
+            </a:pPr>
+            <a:r>
+              <a:rPr lang="en-US" sz="1400" dirty="0">
+                <a:solidFill>
+                  <a:srgbClr val="2AB5A0"/>
+                </a:solidFill>
+                <a:latin typeface="Calibri" pitchFamily="34" charset="0"/>
+                <a:ea typeface="Calibri" pitchFamily="34" charset="-122"/>
+                <a:cs typeface="Calibri" pitchFamily="34" charset="-120"/>
+              </a:rPr>
+              <a:t>✓</a:t>
+            </a:r>
+            <a:endParaRPr lang="en-US" sz="1400" dirty="0"/>
+          </a:p>
+        </p:txBody>
+      </p:sp>
+      <p:sp>
+        <p:nvSpPr>
+          <p:cNvPr id="17" name="Text 15"/>
+          <p:cNvSpPr/>
+          <p:nvPr/>
+        </p:nvSpPr>
+        <p:spPr>
+          <a:xfrm>
+            <a:off x="1005840" y="3511296"/>
+            <a:ext cx="7406640" cy="594360"/>
+          </a:xfrm>
+          <a:prstGeom prst="rect">
+            <a:avLst/>
+          </a:prstGeom>
+          <a:noFill/>
+          <a:ln/>
+        </p:spPr>
+        <p:txBody>
+          <a:bodyPr wrap="square" rtlCol="0" anchor="ctr"/>
+          <a:lstStyle/>
+          <a:p>
+            <a:pPr algn="l" indent="0" marL="0">
+              <a:buNone/>
+            </a:pPr>
+            <a:r>
+              <a:rPr lang="en-US" sz="1200" dirty="0">
+                <a:solidFill>
+                  <a:srgbClr val="FFFFFF"/>
+                </a:solidFill>
+                <a:latin typeface="Calibri" pitchFamily="34" charset="0"/>
+                <a:ea typeface="Calibri" pitchFamily="34" charset="-122"/>
+                <a:cs typeface="Calibri" pitchFamily="34" charset="-120"/>
+              </a:rPr>
+              <a:t>Encodage one-hot des variables catégorielles : aucun ordre artificiel introduit</a:t>
+            </a:r>
+            <a:endParaRPr lang="en-US" sz="1200" dirty="0"/>
+          </a:p>
+        </p:txBody>
+      </p:sp>
+      <p:sp>
+        <p:nvSpPr>
+          <p:cNvPr id="18" name="Text 16"/>
+          <p:cNvSpPr/>
+          <p:nvPr/>
+        </p:nvSpPr>
+        <p:spPr>
+          <a:xfrm>
+            <a:off x="502920" y="4617720"/>
+            <a:ext cx="7772400" cy="320040"/>
+          </a:xfrm>
+          <a:prstGeom prst="rect">
+            <a:avLst/>
+          </a:prstGeom>
+          <a:noFill/>
+          <a:ln/>
+        </p:spPr>
+        <p:txBody>
+          <a:bodyPr wrap="square" rtlCol="0" anchor="ctr"/>
+          <a:lstStyle/>
+          <a:p>
+            <a:pPr algn="l" indent="0" marL="0">
+              <a:buNone/>
+            </a:pPr>
+            <a:r>
+              <a:rPr lang="en-US" sz="1000" i="1" dirty="0">
+                <a:solidFill>
+                  <a:srgbClr val="CBD5E1"/>
+                </a:solidFill>
+                <a:latin typeface="Calibri" pitchFamily="34" charset="0"/>
+                <a:ea typeface="Calibri" pitchFamily="34" charset="-122"/>
+                <a:cs typeface="Calibri" pitchFamily="34" charset="-120"/>
+              </a:rPr>
+              <a:t>Validation croisée K-Fold et contrôle du surapprentissage entraînement / validation</a:t>
             </a:r>
             <a:endParaRPr lang="en-US" sz="1000" dirty="0"/>
           </a:p>
@@ -7098,7 +7716,7 @@
                 <a:ea typeface="Calibri" pitchFamily="34" charset="-122"/>
                 <a:cs typeface="Calibri" pitchFamily="34" charset="-120"/>
               </a:rPr>
-              <a:t>Objectif : </a:t>
+              <a:t xml:space="preserve">Objectif : </a:t>
             </a:r>
             <a:pPr algn="l" indent="0" marL="0">
               <a:buNone/>
@@ -8744,7 +9362,7 @@
                 <a:ea typeface="Calibri" pitchFamily="34" charset="-122"/>
                 <a:cs typeface="Calibri" pitchFamily="34" charset="-120"/>
               </a:rPr>
-              <a:t>2 lignes avec un âge &gt; 80 ans dont une à 123 ans — clairement une erreur de saisie (&lt; 0,001% des données). Ces lignes ont été supprimées pour ne pas biaiser le modèle.</a:t>
+              <a:t>2 lignes avec un âge aberrant (111 et 123 ans) — clairement une erreur de saisie (&lt; 0,001% des données). Ces lignes ont été supprimées pour ne pas biaiser le modèle.</a:t>
             </a:r>
             <a:endParaRPr lang="en-US" sz="1000" dirty="0"/>
           </a:p>
@@ -8810,7 +9428,7 @@
                 <a:ea typeface="Calibri" pitchFamily="34" charset="-122"/>
                 <a:cs typeface="Calibri" pitchFamily="34" charset="-120"/>
               </a:rPr>
-              <a:t>Le fort déséquilibre des classes (3,2% de positifs) impose l'utilisation du paramètre class_weight='balanced' dans tous les modèles.</a:t>
+              <a:t>Le fort déséquilibre des classes (3,2% de positifs) impose l'utilisation du paramètre class_weight='balanced' pour la régression logistique et le Random Forest.</a:t>
             </a:r>
             <a:endParaRPr lang="en-US" sz="1050" dirty="0"/>
           </a:p>
@@ -10324,7 +10942,7 @@
                 <a:ea typeface="Calibri" pitchFamily="34" charset="-122"/>
                 <a:cs typeface="Calibri" pitchFamily="34" charset="-120"/>
               </a:rPr>
-              <a:t>0,497</a:t>
+              <a:t>0,512</a:t>
             </a:r>
             <a:endParaRPr lang="en-US" sz="1700" dirty="0"/>
           </a:p>
@@ -10427,7 +11045,7 @@
                 <a:ea typeface="Calibri" pitchFamily="34" charset="-122"/>
                 <a:cs typeface="Calibri" pitchFamily="34" charset="-120"/>
               </a:rPr>
-              <a:t>0,984</a:t>
+              <a:t>0,986</a:t>
             </a:r>
             <a:endParaRPr lang="en-US" sz="1700" dirty="0"/>
           </a:p>
@@ -10829,7 +11447,7 @@
                 <a:ea typeface="Calibri" pitchFamily="34" charset="-122"/>
                 <a:cs typeface="Calibri" pitchFamily="34" charset="-120"/>
               </a:rPr>
-              <a:t>0,559</a:t>
+              <a:t>0,555</a:t>
             </a:r>
             <a:endParaRPr lang="en-US" sz="1700" dirty="0"/>
           </a:p>
@@ -10932,7 +11550,7 @@
                 <a:ea typeface="Calibri" pitchFamily="34" charset="-122"/>
                 <a:cs typeface="Calibri" pitchFamily="34" charset="-120"/>
               </a:rPr>
-              <a:t>0,985</a:t>
+              <a:t>0,984</a:t>
             </a:r>
             <a:endParaRPr lang="en-US" sz="1700" dirty="0"/>
           </a:p>
@@ -11334,7 +11952,7 @@
                 <a:ea typeface="Calibri" pitchFamily="34" charset="-122"/>
                 <a:cs typeface="Calibri" pitchFamily="34" charset="-120"/>
               </a:rPr>
-              <a:t>0,756</a:t>
+              <a:t>0,757</a:t>
             </a:r>
             <a:endParaRPr lang="en-US" sz="1700" dirty="0"/>
           </a:p>
@@ -11684,7 +12302,7 @@
                 <a:ea typeface="Calibri" pitchFamily="34" charset="-122"/>
                 <a:cs typeface="Calibri" pitchFamily="34" charset="-120"/>
               </a:rPr>
-              <a:t>0,756</a:t>
+              <a:t>0,757</a:t>
             </a:r>
             <a:endParaRPr lang="en-US" sz="3000" dirty="0"/>
           </a:p>
@@ -12110,7 +12728,7 @@
                 <a:ea typeface="Calibri" pitchFamily="34" charset="-122"/>
                 <a:cs typeface="Calibri" pitchFamily="34" charset="-120"/>
               </a:rPr>
-              <a:t>dont 834 convertis prédits (2,6%)</a:t>
+              <a:t>dont 837 convertis prédits (2,65%)</a:t>
             </a:r>
             <a:endParaRPr lang="en-US" sz="900" dirty="0"/>
           </a:p>
@@ -12176,7 +12794,7 @@
                 <a:ea typeface="Calibri" pitchFamily="34" charset="-122"/>
                 <a:cs typeface="Calibri" pitchFamily="34" charset="-120"/>
               </a:rPr>
-              <a:t>Gradient Boosting : +26 pts de F1 vs baseline. ROC-AUC &gt; 0,98 pour les 3 modèles.</a:t>
+              <a:t>Gradient Boosting : +25 pts de F1 vs baseline. ROC-AUC &gt; 0,98 pour les 3 modèles.</a:t>
             </a:r>
             <a:endParaRPr lang="en-US" sz="1000" dirty="0"/>
           </a:p>
@@ -12423,7 +13041,7 @@
                 <a:ea typeface="Calibri" pitchFamily="34" charset="-122"/>
                 <a:cs typeface="Calibri" pitchFamily="34" charset="-120"/>
               </a:rPr>
-              <a:t>87,4 %</a:t>
+              <a:t>87,5 %</a:t>
             </a:r>
             <a:endParaRPr lang="en-US" sz="1200" dirty="0"/>
           </a:p>
@@ -12540,7 +13158,7 @@
                 <a:ea typeface="Calibri" pitchFamily="34" charset="-122"/>
                 <a:cs typeface="Calibri" pitchFamily="34" charset="-120"/>
               </a:rPr>
-              <a:t>5,9 %</a:t>
+              <a:t>5,7 %</a:t>
             </a:r>
             <a:endParaRPr lang="en-US" sz="1200" dirty="0"/>
           </a:p>
@@ -12657,7 +13275,7 @@
                 <a:ea typeface="Calibri" pitchFamily="34" charset="-122"/>
                 <a:cs typeface="Calibri" pitchFamily="34" charset="-120"/>
               </a:rPr>
-              <a:t>4,2 %</a:t>
+              <a:t>4,1 %</a:t>
             </a:r>
             <a:endParaRPr lang="en-US" sz="1200" dirty="0"/>
           </a:p>
